--- a/Specialisterne - CV ENG - Alexander Andersen.pptx
+++ b/Specialisterne - CV ENG - Alexander Andersen.pptx
@@ -325,7 +325,7 @@
             <a:fld id="{1D8BD707-D9CF-40AE-B4C6-C98DA3205C09}" type="datetimeFigureOut">
               <a:rPr lang="en-US" smtClean="0"/>
               <a:pPr/>
-              <a:t>5/14/2025</a:t>
+              <a:t>5/16/2025</a:t>
             </a:fld>
             <a:endParaRPr lang="en-US"/>
           </a:p>
@@ -490,7 +490,7 @@
             <a:fld id="{1D8BD707-D9CF-40AE-B4C6-C98DA3205C09}" type="datetimeFigureOut">
               <a:rPr lang="en-US" smtClean="0"/>
               <a:pPr/>
-              <a:t>5/14/2025</a:t>
+              <a:t>5/16/2025</a:t>
             </a:fld>
             <a:endParaRPr lang="en-US"/>
           </a:p>
@@ -665,7 +665,7 @@
             <a:fld id="{1D8BD707-D9CF-40AE-B4C6-C98DA3205C09}" type="datetimeFigureOut">
               <a:rPr lang="en-US" smtClean="0"/>
               <a:pPr/>
-              <a:t>5/14/2025</a:t>
+              <a:t>5/16/2025</a:t>
             </a:fld>
             <a:endParaRPr lang="en-US"/>
           </a:p>
@@ -830,7 +830,7 @@
             <a:fld id="{1D8BD707-D9CF-40AE-B4C6-C98DA3205C09}" type="datetimeFigureOut">
               <a:rPr lang="en-US" smtClean="0"/>
               <a:pPr/>
-              <a:t>5/14/2025</a:t>
+              <a:t>5/16/2025</a:t>
             </a:fld>
             <a:endParaRPr lang="en-US"/>
           </a:p>
@@ -1072,7 +1072,7 @@
             <a:fld id="{1D8BD707-D9CF-40AE-B4C6-C98DA3205C09}" type="datetimeFigureOut">
               <a:rPr lang="en-US" smtClean="0"/>
               <a:pPr/>
-              <a:t>5/14/2025</a:t>
+              <a:t>5/16/2025</a:t>
             </a:fld>
             <a:endParaRPr lang="en-US"/>
           </a:p>
@@ -1354,7 +1354,7 @@
             <a:fld id="{1D8BD707-D9CF-40AE-B4C6-C98DA3205C09}" type="datetimeFigureOut">
               <a:rPr lang="en-US" smtClean="0"/>
               <a:pPr/>
-              <a:t>5/14/2025</a:t>
+              <a:t>5/16/2025</a:t>
             </a:fld>
             <a:endParaRPr lang="en-US"/>
           </a:p>
@@ -1770,7 +1770,7 @@
             <a:fld id="{1D8BD707-D9CF-40AE-B4C6-C98DA3205C09}" type="datetimeFigureOut">
               <a:rPr lang="en-US" smtClean="0"/>
               <a:pPr/>
-              <a:t>5/14/2025</a:t>
+              <a:t>5/16/2025</a:t>
             </a:fld>
             <a:endParaRPr lang="en-US"/>
           </a:p>
@@ -1884,7 +1884,7 @@
             <a:fld id="{1D8BD707-D9CF-40AE-B4C6-C98DA3205C09}" type="datetimeFigureOut">
               <a:rPr lang="en-US" smtClean="0"/>
               <a:pPr/>
-              <a:t>5/14/2025</a:t>
+              <a:t>5/16/2025</a:t>
             </a:fld>
             <a:endParaRPr lang="en-US"/>
           </a:p>
@@ -1976,7 +1976,7 @@
             <a:fld id="{1D8BD707-D9CF-40AE-B4C6-C98DA3205C09}" type="datetimeFigureOut">
               <a:rPr lang="en-US" smtClean="0"/>
               <a:pPr/>
-              <a:t>5/14/2025</a:t>
+              <a:t>5/16/2025</a:t>
             </a:fld>
             <a:endParaRPr lang="en-US"/>
           </a:p>
@@ -2248,7 +2248,7 @@
             <a:fld id="{1D8BD707-D9CF-40AE-B4C6-C98DA3205C09}" type="datetimeFigureOut">
               <a:rPr lang="en-US" smtClean="0"/>
               <a:pPr/>
-              <a:t>5/14/2025</a:t>
+              <a:t>5/16/2025</a:t>
             </a:fld>
             <a:endParaRPr lang="en-US"/>
           </a:p>
@@ -2497,7 +2497,7 @@
             <a:fld id="{1D8BD707-D9CF-40AE-B4C6-C98DA3205C09}" type="datetimeFigureOut">
               <a:rPr lang="en-US" smtClean="0"/>
               <a:pPr/>
-              <a:t>5/14/2025</a:t>
+              <a:t>5/16/2025</a:t>
             </a:fld>
             <a:endParaRPr lang="en-US"/>
           </a:p>
@@ -2705,7 +2705,7 @@
             <a:fld id="{1D8BD707-D9CF-40AE-B4C6-C98DA3205C09}" type="datetimeFigureOut">
               <a:rPr lang="en-US" smtClean="0"/>
               <a:pPr/>
-              <a:t>5/14/2025</a:t>
+              <a:t>5/16/2025</a:t>
             </a:fld>
             <a:endParaRPr lang="en-US"/>
           </a:p>
@@ -4712,8 +4712,8 @@
         </p:nvSpPr>
         <p:spPr>
           <a:xfrm>
-            <a:off x="1660957" y="5955599"/>
-            <a:ext cx="4327657" cy="1596014"/>
+            <a:off x="1622005" y="5863091"/>
+            <a:ext cx="4327657" cy="1865319"/>
           </a:xfrm>
           <a:prstGeom prst="rect">
             <a:avLst/>
@@ -4754,7 +4754,7 @@
               <a:buChar char="•"/>
             </a:pPr>
             <a:r>
-              <a:rPr lang="en-US" sz="1500" dirty="0" err="1">
+              <a:rPr lang="en-US" sz="1500" dirty="0">
                 <a:solidFill>
                   <a:srgbClr val="003B8B"/>
                 </a:solidFill>
@@ -4763,19 +4763,7 @@
                 </a:highlight>
                 <a:latin typeface="Montserrat"/>
               </a:rPr>
-              <a:t>Promoter_learner</a:t>
-            </a:r>
-            <a:r>
-              <a:rPr lang="en-US" sz="1500" dirty="0">
-                <a:solidFill>
-                  <a:srgbClr val="003B8B"/>
-                </a:solidFill>
-                <a:highlight>
-                  <a:srgbClr val="FFFF00"/>
-                </a:highlight>
-                <a:latin typeface="Montserrat"/>
-              </a:rPr>
-              <a:t> -  deep learning model for promoter prediction</a:t>
+              <a:t>deep learning promoter prediction</a:t>
             </a:r>
           </a:p>
           <a:p>
@@ -4787,7 +4775,7 @@
               <a:buChar char="•"/>
             </a:pPr>
             <a:r>
-              <a:rPr lang="en-US" sz="1500" dirty="0" err="1">
+              <a:rPr lang="en-US" sz="1500" dirty="0">
                 <a:solidFill>
                   <a:srgbClr val="003B8B"/>
                 </a:solidFill>
@@ -4796,19 +4784,7 @@
                 </a:highlight>
                 <a:latin typeface="Montserrat"/>
               </a:rPr>
-              <a:t>Spil_salgs_analyse</a:t>
-            </a:r>
-            <a:r>
-              <a:rPr lang="en-US" sz="1500" dirty="0">
-                <a:solidFill>
-                  <a:srgbClr val="003B8B"/>
-                </a:solidFill>
-                <a:highlight>
-                  <a:srgbClr val="FFFF00"/>
-                </a:highlight>
-                <a:latin typeface="Montserrat"/>
-              </a:rPr>
-              <a:t> In </a:t>
+              <a:t>Business analysis In </a:t>
             </a:r>
             <a:r>
               <a:rPr lang="en-US" sz="1500" dirty="0" err="1">
@@ -4821,6 +4797,57 @@
                 <a:latin typeface="Montserrat"/>
               </a:rPr>
               <a:t>powerBI</a:t>
+            </a:r>
+            <a:endParaRPr lang="en-US" sz="1500" dirty="0">
+              <a:solidFill>
+                <a:srgbClr val="003B8B"/>
+              </a:solidFill>
+              <a:highlight>
+                <a:srgbClr val="FFFF00"/>
+              </a:highlight>
+              <a:latin typeface="Montserrat"/>
+            </a:endParaRPr>
+          </a:p>
+          <a:p>
+            <a:pPr marL="323850" lvl="1" indent="-161925">
+              <a:lnSpc>
+                <a:spcPts val="2100"/>
+              </a:lnSpc>
+              <a:buFont typeface="Arial"/>
+              <a:buChar char="•"/>
+            </a:pPr>
+            <a:r>
+              <a:rPr lang="en-US" sz="1500" dirty="0">
+                <a:solidFill>
+                  <a:srgbClr val="003B8B"/>
+                </a:solidFill>
+                <a:highlight>
+                  <a:srgbClr val="FFFF00"/>
+                </a:highlight>
+                <a:latin typeface="Montserrat"/>
+              </a:rPr>
+              <a:t>ETL-management</a:t>
+            </a:r>
+          </a:p>
+          <a:p>
+            <a:pPr marL="323850" lvl="1" indent="-161925">
+              <a:lnSpc>
+                <a:spcPts val="2100"/>
+              </a:lnSpc>
+              <a:buFont typeface="Arial"/>
+              <a:buChar char="•"/>
+            </a:pPr>
+            <a:r>
+              <a:rPr lang="en-US" sz="1500" dirty="0" err="1">
+                <a:solidFill>
+                  <a:srgbClr val="003B8B"/>
+                </a:solidFill>
+                <a:highlight>
+                  <a:srgbClr val="FFFF00"/>
+                </a:highlight>
+                <a:latin typeface="Montserrat"/>
+              </a:rPr>
+              <a:t>TransporterPAL</a:t>
             </a:r>
             <a:endParaRPr lang="en-US" sz="1500" dirty="0">
               <a:solidFill>
@@ -5487,7 +5514,7 @@
                 </a:highlight>
                 <a:latin typeface="Montserrat"/>
               </a:rPr>
-              <a:t>Microsoft</a:t>
+              <a:t>ETL</a:t>
             </a:r>
           </a:p>
           <a:p>
@@ -5550,7 +5577,7 @@
               <a:buChar char="•"/>
             </a:pPr>
             <a:r>
-              <a:rPr lang="en-US" sz="1500" dirty="0">
+              <a:rPr lang="en-US" sz="1500" dirty="0" err="1">
                 <a:solidFill>
                   <a:srgbClr val="003B8B"/>
                 </a:solidFill>
@@ -5559,8 +5586,17 @@
                 </a:highlight>
                 <a:latin typeface="Montserrat"/>
               </a:rPr>
-              <a:t>Machine/deep learning</a:t>
-            </a:r>
+              <a:t>Pytorch</a:t>
+            </a:r>
+            <a:endParaRPr lang="en-US" sz="1500" dirty="0">
+              <a:solidFill>
+                <a:srgbClr val="003B8B"/>
+              </a:solidFill>
+              <a:highlight>
+                <a:srgbClr val="FFFF00"/>
+              </a:highlight>
+              <a:latin typeface="Montserrat"/>
+            </a:endParaRPr>
           </a:p>
         </p:txBody>
       </p:sp>
@@ -6453,6 +6489,15 @@
 </file>
 
 <file path=customXml/item2.xml><?xml version="1.0" encoding="utf-8"?>
+<?mso-contentType ?>
+<FormTemplates xmlns="http://schemas.microsoft.com/sharepoint/v3/contenttype/forms">
+  <Display>DocumentLibraryForm</Display>
+  <Edit>DocumentLibraryForm</Edit>
+  <New>DocumentLibraryForm</New>
+</FormTemplates>
+</file>
+
+<file path=customXml/item3.xml><?xml version="1.0" encoding="utf-8"?>
 <ct:contentTypeSchema xmlns:ct="http://schemas.microsoft.com/office/2006/metadata/contentType" xmlns:ma="http://schemas.microsoft.com/office/2006/metadata/properties/metaAttributes" ct:_="" ma:_="" ma:contentTypeName="Document" ma:contentTypeID="0x01010001E116FBCB68D34C998BF52594C3C07A" ma:contentTypeVersion="11" ma:contentTypeDescription="Create a new document." ma:contentTypeScope="" ma:versionID="1550cf844cdd52efbf325c99db1a3bba">
   <xsd:schema xmlns:xsd="http://www.w3.org/2001/XMLSchema" xmlns:xs="http://www.w3.org/2001/XMLSchema" xmlns:p="http://schemas.microsoft.com/office/2006/metadata/properties" xmlns:ns2="442a18bd-e17f-43f6-a861-caed589f5d93" xmlns:ns3="815cde93-60ed-4188-96d2-24495b59efdb" targetNamespace="http://schemas.microsoft.com/office/2006/metadata/properties" ma:root="true" ma:fieldsID="704e2908d01d989e4d3c0793fd90259a" ns2:_="" ns3:_="">
     <xsd:import namespace="442a18bd-e17f-43f6-a861-caed589f5d93"/>
@@ -6647,15 +6692,6 @@
 </ct:contentTypeSchema>
 </file>
 
-<file path=customXml/item3.xml><?xml version="1.0" encoding="utf-8"?>
-<?mso-contentType ?>
-<FormTemplates xmlns="http://schemas.microsoft.com/sharepoint/v3/contenttype/forms">
-  <Display>DocumentLibraryForm</Display>
-  <Edit>DocumentLibraryForm</Edit>
-  <New>DocumentLibraryForm</New>
-</FormTemplates>
-</file>
-
 <file path=customXml/itemProps1.xml><?xml version="1.0" encoding="utf-8"?>
 <ds:datastoreItem xmlns:ds="http://schemas.openxmlformats.org/officeDocument/2006/customXml" ds:itemID="{7080551A-67DC-400D-A79F-21D174A5CB57}">
   <ds:schemaRefs>
@@ -6676,6 +6712,14 @@
 </file>
 
 <file path=customXml/itemProps2.xml><?xml version="1.0" encoding="utf-8"?>
+<ds:datastoreItem xmlns:ds="http://schemas.openxmlformats.org/officeDocument/2006/customXml" ds:itemID="{43B3A9D5-53B5-45DF-850D-ADEE1C1D330B}">
+  <ds:schemaRefs>
+    <ds:schemaRef ds:uri="http://schemas.microsoft.com/sharepoint/v3/contenttype/forms"/>
+  </ds:schemaRefs>
+</ds:datastoreItem>
+</file>
+
+<file path=customXml/itemProps3.xml><?xml version="1.0" encoding="utf-8"?>
 <ds:datastoreItem xmlns:ds="http://schemas.openxmlformats.org/officeDocument/2006/customXml" ds:itemID="{A62A778F-84B7-4F37-97B2-BBDEAD625382}">
   <ds:schemaRefs>
     <ds:schemaRef ds:uri="http://schemas.microsoft.com/office/2006/metadata/contentType"/>
@@ -6692,12 +6736,4 @@
     <ds:schemaRef ds:uri="http://schemas.microsoft.com/internal/obd"/>
   </ds:schemaRefs>
 </ds:datastoreItem>
-</file>
-
-<file path=customXml/itemProps3.xml><?xml version="1.0" encoding="utf-8"?>
-<ds:datastoreItem xmlns:ds="http://schemas.openxmlformats.org/officeDocument/2006/customXml" ds:itemID="{43B3A9D5-53B5-45DF-850D-ADEE1C1D330B}">
-  <ds:schemaRefs>
-    <ds:schemaRef ds:uri="http://schemas.microsoft.com/sharepoint/v3/contenttype/forms"/>
-  </ds:schemaRefs>
-</ds:datastoreItem>
 </file>